--- a/docs/thesis-defence/WPNS1_defence_deck.pptx
+++ b/docs/thesis-defence/WPNS1_defence_deck.pptx
@@ -4003,9 +4003,35 @@
           </a:prstGeom>
         </p:spPr>
       </p:pic>
-      <p:sp>
-        <p:nvSpPr>
-          <p:cNvPr id="3" name="Text 0"/>
+      <p:pic>
+        <p:nvPicPr>
+          <p:cNvPr id="3" name="Image 1" descr="/home/user/valentown/docs/thesis-defence/build/bat_white_bones.png">    </p:cNvPr>
+          <p:cNvPicPr>
+            <a:picLocks noChangeAspect="1"/>
+          </p:cNvPicPr>
+          <p:nvPr/>
+        </p:nvPicPr>
+        <p:blipFill>
+          <a:blip r:embed="rId2">
+            <a:alphaModFix amt="82000"/>
+          </a:blip>
+          <a:stretch>
+            <a:fillRect/>
+          </a:stretch>
+        </p:blipFill>
+        <p:spPr>
+          <a:xfrm>
+            <a:off x="566928" y="4315968"/>
+            <a:ext cx="1517904" cy="342900"/>
+          </a:xfrm>
+          <a:prstGeom prst="rect">
+            <a:avLst/>
+          </a:prstGeom>
+        </p:spPr>
+      </p:pic>
+      <p:sp>
+        <p:nvSpPr>
+          <p:cNvPr id="4" name="Text 0"/>
           <p:cNvSpPr txBox="1"/>
           <p:nvPr/>
         </p:nvSpPr>
@@ -4044,7 +4070,7 @@
       </p:sp>
       <p:sp>
         <p:nvSpPr>
-          <p:cNvPr id="4" name="Text 1"/>
+          <p:cNvPr id="5" name="Text 1"/>
           <p:cNvSpPr txBox="1"/>
           <p:nvPr/>
         </p:nvSpPr>
@@ -4126,7 +4152,7 @@
       </p:sp>
       <p:sp>
         <p:nvSpPr>
-          <p:cNvPr id="5" name="Text 2"/>
+          <p:cNvPr id="6" name="Text 2"/>
           <p:cNvSpPr txBox="1"/>
           <p:nvPr/>
         </p:nvSpPr>
@@ -5427,90 +5453,9 @@
           </a:ln>
         </p:spPr>
       </p:sp>
-      <p:sp>
-        <p:nvSpPr>
-          <p:cNvPr id="6" name="Text 3"/>
-          <p:cNvSpPr txBox="1"/>
-          <p:nvPr/>
-        </p:nvSpPr>
-        <p:spPr>
-          <a:xfrm>
-            <a:off x="566928" y="3529584"/>
-            <a:ext cx="5358384" cy="310896"/>
-          </a:xfrm>
-          <a:prstGeom prst="rect">
-            <a:avLst/>
-          </a:prstGeom>
-          <a:noFill/>
-          <a:ln/>
-        </p:spPr>
-        <p:txBody>
-          <a:bodyPr wrap="square" lIns="0" tIns="0" rIns="0" bIns="0" rtlCol="0" anchor="ctr"/>
-          <a:lstStyle/>
-          <a:p>
-            <a:pPr indent="0" marL="0">
-              <a:buNone/>
-            </a:pPr>
-            <a:r>
-              <a:rPr lang="en-US" sz="1500" b="1" dirty="0">
-                <a:solidFill>
-                  <a:srgbClr val="F2A541"/>
-                </a:solidFill>
-                <a:latin typeface="Calibri" pitchFamily="34" charset="0"/>
-                <a:ea typeface="Calibri" pitchFamily="34" charset="-122"/>
-                <a:cs typeface="Calibri" pitchFamily="34" charset="-120"/>
-              </a:rPr>
-              <a:t>Buzz-like</a:t>
-            </a:r>
-            <a:endParaRPr lang="en-US" sz="1500" dirty="0"/>
-          </a:p>
-        </p:txBody>
-      </p:sp>
-      <p:sp>
-        <p:nvSpPr>
-          <p:cNvPr id="7" name="Text 4"/>
-          <p:cNvSpPr txBox="1"/>
-          <p:nvPr/>
-        </p:nvSpPr>
-        <p:spPr>
-          <a:xfrm>
-            <a:off x="566928" y="3858768"/>
-            <a:ext cx="5358384" cy="694944"/>
-          </a:xfrm>
-          <a:prstGeom prst="rect">
-            <a:avLst/>
-          </a:prstGeom>
-          <a:noFill/>
-          <a:ln/>
-        </p:spPr>
-        <p:txBody>
-          <a:bodyPr wrap="square" lIns="0" tIns="0" rIns="0" bIns="0" rtlCol="0" anchor="ctr"/>
-          <a:lstStyle/>
-          <a:p>
-            <a:pPr indent="0" marL="0">
-              <a:lnSpc>
-                <a:spcPts val="1800"/>
-              </a:lnSpc>
-              <a:buNone/>
-            </a:pPr>
-            <a:r>
-              <a:rPr lang="en-US" sz="1300" dirty="0">
-                <a:solidFill>
-                  <a:srgbClr val="C3D2E8"/>
-                </a:solidFill>
-                <a:latin typeface="Calibri" pitchFamily="34" charset="0"/>
-                <a:ea typeface="Calibri" pitchFamily="34" charset="-122"/>
-                <a:cs typeface="Calibri" pitchFamily="34" charset="-120"/>
-              </a:rPr>
-              <a:t>Intervals compress into a terminal buzz and the sequence stops. Short, and changing rapidly.</a:t>
-            </a:r>
-            <a:endParaRPr lang="en-US" sz="1300" dirty="0"/>
-          </a:p>
-        </p:txBody>
-      </p:sp>
       <p:pic>
         <p:nvPicPr>
-          <p:cNvPr id="8" name="Image 1" descr="/home/user/valentown/docs/thesis-defence/build/spec_insect.png">    </p:cNvPr>
+          <p:cNvPr id="6" name="Image 1" descr="/home/user/valentown/docs/thesis-defence/build/bat_amber.png">    </p:cNvPr>
           <p:cNvPicPr>
             <a:picLocks noChangeAspect="1"/>
           </p:cNvPicPr>
@@ -5524,6 +5469,111 @@
         </p:blipFill>
         <p:spPr>
           <a:xfrm>
+            <a:off x="566928" y="3602736"/>
+            <a:ext cx="932688" cy="210312"/>
+          </a:xfrm>
+          <a:prstGeom prst="rect">
+            <a:avLst/>
+          </a:prstGeom>
+        </p:spPr>
+      </p:pic>
+      <p:sp>
+        <p:nvSpPr>
+          <p:cNvPr id="7" name="Text 3"/>
+          <p:cNvSpPr txBox="1"/>
+          <p:nvPr/>
+        </p:nvSpPr>
+        <p:spPr>
+          <a:xfrm>
+            <a:off x="1645920" y="3529584"/>
+            <a:ext cx="4261104" cy="310896"/>
+          </a:xfrm>
+          <a:prstGeom prst="rect">
+            <a:avLst/>
+          </a:prstGeom>
+          <a:noFill/>
+          <a:ln/>
+        </p:spPr>
+        <p:txBody>
+          <a:bodyPr wrap="square" lIns="0" tIns="0" rIns="0" bIns="0" rtlCol="0" anchor="ctr"/>
+          <a:lstStyle/>
+          <a:p>
+            <a:pPr indent="0" marL="0">
+              <a:buNone/>
+            </a:pPr>
+            <a:r>
+              <a:rPr lang="en-US" sz="1500" b="1" dirty="0">
+                <a:solidFill>
+                  <a:srgbClr val="F2A541"/>
+                </a:solidFill>
+                <a:latin typeface="Calibri" pitchFamily="34" charset="0"/>
+                <a:ea typeface="Calibri" pitchFamily="34" charset="-122"/>
+                <a:cs typeface="Calibri" pitchFamily="34" charset="-120"/>
+              </a:rPr>
+              <a:t>Buzz-like</a:t>
+            </a:r>
+            <a:endParaRPr lang="en-US" sz="1500" dirty="0"/>
+          </a:p>
+        </p:txBody>
+      </p:sp>
+      <p:sp>
+        <p:nvSpPr>
+          <p:cNvPr id="8" name="Text 4"/>
+          <p:cNvSpPr txBox="1"/>
+          <p:nvPr/>
+        </p:nvSpPr>
+        <p:spPr>
+          <a:xfrm>
+            <a:off x="566928" y="3931920"/>
+            <a:ext cx="5358384" cy="694944"/>
+          </a:xfrm>
+          <a:prstGeom prst="rect">
+            <a:avLst/>
+          </a:prstGeom>
+          <a:noFill/>
+          <a:ln/>
+        </p:spPr>
+        <p:txBody>
+          <a:bodyPr wrap="square" lIns="0" tIns="0" rIns="0" bIns="0" rtlCol="0" anchor="t"/>
+          <a:lstStyle/>
+          <a:p>
+            <a:pPr indent="0" marL="0">
+              <a:lnSpc>
+                <a:spcPts val="1800"/>
+              </a:lnSpc>
+              <a:buNone/>
+            </a:pPr>
+            <a:r>
+              <a:rPr lang="en-US" sz="1300" dirty="0">
+                <a:solidFill>
+                  <a:srgbClr val="C3D2E8"/>
+                </a:solidFill>
+                <a:latin typeface="Calibri" pitchFamily="34" charset="0"/>
+                <a:ea typeface="Calibri" pitchFamily="34" charset="-122"/>
+                <a:cs typeface="Calibri" pitchFamily="34" charset="-120"/>
+              </a:rPr>
+              <a:t>Intervals compress into a terminal buzz and the sequence stops. Short, and changing rapidly.</a:t>
+            </a:r>
+            <a:endParaRPr lang="en-US" sz="1300" dirty="0"/>
+          </a:p>
+        </p:txBody>
+      </p:sp>
+      <p:pic>
+        <p:nvPicPr>
+          <p:cNvPr id="9" name="Image 2" descr="/home/user/valentown/docs/thesis-defence/build/spec_insect.png">    </p:cNvPr>
+          <p:cNvPicPr>
+            <a:picLocks noChangeAspect="1"/>
+          </p:cNvPicPr>
+          <p:nvPr/>
+        </p:nvPicPr>
+        <p:blipFill>
+          <a:blip r:embed="rId3"/>
+          <a:stretch>
+            <a:fillRect/>
+          </a:stretch>
+        </p:blipFill>
+        <p:spPr>
+          <a:xfrm>
             <a:off x="6266383" y="1883664"/>
             <a:ext cx="5358384" cy="1527048"/>
           </a:xfrm>
@@ -5534,7 +5584,7 @@
       </p:pic>
       <p:sp>
         <p:nvSpPr>
-          <p:cNvPr id="9" name="Shape 5"/>
+          <p:cNvPr id="10" name="Shape 5"/>
           <p:cNvSpPr/>
           <p:nvPr/>
         </p:nvSpPr>
@@ -5554,16 +5604,40 @@
           </a:ln>
         </p:spPr>
       </p:sp>
-      <p:sp>
-        <p:nvSpPr>
-          <p:cNvPr id="10" name="Text 6"/>
-          <p:cNvSpPr txBox="1"/>
-          <p:nvPr/>
-        </p:nvSpPr>
-        <p:spPr>
-          <a:xfrm>
-            <a:off x="6266383" y="3529584"/>
-            <a:ext cx="5358384" cy="310896"/>
+      <p:pic>
+        <p:nvPicPr>
+          <p:cNvPr id="11" name="Image 3" descr="/home/user/valentown/docs/thesis-defence/build/insect_coral.png">    </p:cNvPr>
+          <p:cNvPicPr>
+            <a:picLocks noChangeAspect="1"/>
+          </p:cNvPicPr>
+          <p:nvPr/>
+        </p:nvPicPr>
+        <p:blipFill>
+          <a:blip r:embed="rId4"/>
+          <a:stretch>
+            <a:fillRect/>
+          </a:stretch>
+        </p:blipFill>
+        <p:spPr>
+          <a:xfrm>
+            <a:off x="6266383" y="3474720"/>
+            <a:ext cx="475488" cy="475488"/>
+          </a:xfrm>
+          <a:prstGeom prst="rect">
+            <a:avLst/>
+          </a:prstGeom>
+        </p:spPr>
+      </p:pic>
+      <p:sp>
+        <p:nvSpPr>
+          <p:cNvPr id="12" name="Text 6"/>
+          <p:cNvSpPr txBox="1"/>
+          <p:nvPr/>
+        </p:nvSpPr>
+        <p:spPr>
+          <a:xfrm>
+            <a:off x="6869887" y="3529584"/>
+            <a:ext cx="4261104" cy="310896"/>
           </a:xfrm>
           <a:prstGeom prst="rect">
             <a:avLst/>
@@ -5595,13 +5669,13 @@
       </p:sp>
       <p:sp>
         <p:nvSpPr>
-          <p:cNvPr id="11" name="Text 7"/>
-          <p:cNvSpPr txBox="1"/>
-          <p:nvPr/>
-        </p:nvSpPr>
-        <p:spPr>
-          <a:xfrm>
-            <a:off x="6266383" y="3858768"/>
+          <p:cNvPr id="13" name="Text 7"/>
+          <p:cNvSpPr txBox="1"/>
+          <p:nvPr/>
+        </p:nvSpPr>
+        <p:spPr>
+          <a:xfrm>
+            <a:off x="6266383" y="3931920"/>
             <a:ext cx="5358384" cy="694944"/>
           </a:xfrm>
           <a:prstGeom prst="rect">
@@ -5611,7 +5685,7 @@
           <a:ln/>
         </p:spPr>
         <p:txBody>
-          <a:bodyPr wrap="square" lIns="0" tIns="0" rIns="0" bIns="0" rtlCol="0" anchor="ctr"/>
+          <a:bodyPr wrap="square" lIns="0" tIns="0" rIns="0" bIns="0" rtlCol="0" anchor="t"/>
           <a:lstStyle/>
           <a:p>
             <a:pPr indent="0" marL="0">
@@ -5637,7 +5711,7 @@
       </p:sp>
       <p:sp>
         <p:nvSpPr>
-          <p:cNvPr id="12" name="Text 8"/>
+          <p:cNvPr id="14" name="Text 8"/>
           <p:cNvSpPr txBox="1"/>
           <p:nvPr/>
         </p:nvSpPr>
@@ -5676,7 +5750,7 @@
       </p:sp>
       <p:sp>
         <p:nvSpPr>
-          <p:cNvPr id="13" name="Shape 9"/>
+          <p:cNvPr id="15" name="Shape 9"/>
           <p:cNvSpPr/>
           <p:nvPr/>
         </p:nvSpPr>
@@ -5703,7 +5777,7 @@
       </p:sp>
       <p:sp>
         <p:nvSpPr>
-          <p:cNvPr id="14" name="Text 10"/>
+          <p:cNvPr id="16" name="Text 10"/>
           <p:cNvSpPr txBox="1"/>
           <p:nvPr/>
         </p:nvSpPr>
@@ -5762,7 +5836,7 @@
       </p:sp>
       <p:sp>
         <p:nvSpPr>
-          <p:cNvPr id="15" name="Text 11"/>
+          <p:cNvPr id="17" name="Text 11"/>
           <p:cNvSpPr txBox="1"/>
           <p:nvPr/>
         </p:nvSpPr>
@@ -5801,7 +5875,7 @@
       </p:sp>
       <p:sp>
         <p:nvSpPr>
-          <p:cNvPr id="16" name="Text 12"/>
+          <p:cNvPr id="18" name="Text 12"/>
           <p:cNvSpPr txBox="1"/>
           <p:nvPr/>
         </p:nvSpPr>
@@ -7792,9 +7866,61 @@
           </a:prstGeom>
         </p:spPr>
       </p:pic>
-      <p:sp>
-        <p:nvSpPr>
-          <p:cNvPr id="3" name="Text 0"/>
+      <p:pic>
+        <p:nvPicPr>
+          <p:cNvPr id="3" name="Image 1" descr="/home/user/valentown/docs/thesis-defence/build/bat_white_bones.png">    </p:cNvPr>
+          <p:cNvPicPr>
+            <a:picLocks noChangeAspect="1"/>
+          </p:cNvPicPr>
+          <p:nvPr/>
+        </p:nvPicPr>
+        <p:blipFill>
+          <a:blip r:embed="rId2">
+            <a:alphaModFix amt="80000"/>
+          </a:blip>
+          <a:stretch>
+            <a:fillRect/>
+          </a:stretch>
+        </p:blipFill>
+        <p:spPr>
+          <a:xfrm>
+            <a:off x="566928" y="5029200"/>
+            <a:ext cx="1408176" cy="318211"/>
+          </a:xfrm>
+          <a:prstGeom prst="rect">
+            <a:avLst/>
+          </a:prstGeom>
+        </p:spPr>
+      </p:pic>
+      <p:pic>
+        <p:nvPicPr>
+          <p:cNvPr id="4" name="Image 2" descr="/home/user/valentown/docs/thesis-defence/build/bat_white.png">    </p:cNvPr>
+          <p:cNvPicPr>
+            <a:picLocks noChangeAspect="1"/>
+          </p:cNvPicPr>
+          <p:nvPr/>
+        </p:nvPicPr>
+        <p:blipFill>
+          <a:blip r:embed="rId3">
+            <a:alphaModFix amt="8000"/>
+          </a:blip>
+          <a:stretch>
+            <a:fillRect/>
+          </a:stretch>
+        </p:blipFill>
+        <p:spPr>
+          <a:xfrm>
+            <a:off x="8101584" y="1883664"/>
+            <a:ext cx="3511296" cy="792785"/>
+          </a:xfrm>
+          <a:prstGeom prst="rect">
+            <a:avLst/>
+          </a:prstGeom>
+        </p:spPr>
+      </p:pic>
+      <p:sp>
+        <p:nvSpPr>
+          <p:cNvPr id="5" name="Text 0"/>
           <p:cNvSpPr txBox="1"/>
           <p:nvPr/>
         </p:nvSpPr>
@@ -7833,7 +7959,7 @@
       </p:sp>
       <p:sp>
         <p:nvSpPr>
-          <p:cNvPr id="4" name="Text 1"/>
+          <p:cNvPr id="6" name="Text 1"/>
           <p:cNvSpPr txBox="1"/>
           <p:nvPr/>
         </p:nvSpPr>
@@ -7872,7 +7998,7 @@
       </p:sp>
       <p:sp>
         <p:nvSpPr>
-          <p:cNvPr id="5" name="Text 2"/>
+          <p:cNvPr id="7" name="Text 2"/>
           <p:cNvSpPr txBox="1"/>
           <p:nvPr/>
         </p:nvSpPr>
@@ -14781,7 +14907,7 @@
       </p:sp>
       <p:pic>
         <p:nvPicPr>
-          <p:cNvPr id="15" name="Image 0" descr="/home/user/valentown/docs/thesis-defence/build/spec_buzz.png">    </p:cNvPr>
+          <p:cNvPr id="15" name="Image 0" descr="/home/user/valentown/docs/thesis-defence/build/spec_buzz_lead.png">    </p:cNvPr>
           <p:cNvPicPr>
             <a:picLocks noChangeAspect="1"/>
           </p:cNvPicPr>
@@ -14796,22 +14922,48 @@
         <p:spPr>
           <a:xfrm>
             <a:off x="6675120" y="3054096"/>
-            <a:ext cx="4946904" cy="1417320"/>
+            <a:ext cx="4946904" cy="1133856"/>
           </a:xfrm>
           <a:prstGeom prst="rect">
             <a:avLst/>
           </a:prstGeom>
         </p:spPr>
       </p:pic>
-      <p:sp>
-        <p:nvSpPr>
-          <p:cNvPr id="16" name="Text 13"/>
-          <p:cNvSpPr txBox="1"/>
-          <p:nvPr/>
-        </p:nvSpPr>
-        <p:spPr>
-          <a:xfrm>
-            <a:off x="6675120" y="4572000"/>
+      <p:pic>
+        <p:nvPicPr>
+          <p:cNvPr id="16" name="Image 1" descr="/home/user/valentown/docs/thesis-defence/build/bat_white.png">    </p:cNvPr>
+          <p:cNvPicPr>
+            <a:picLocks noChangeAspect="1"/>
+          </p:cNvPicPr>
+          <p:nvPr/>
+        </p:nvPicPr>
+        <p:blipFill>
+          <a:blip r:embed="rId2">
+            <a:alphaModFix amt="88000"/>
+          </a:blip>
+          <a:stretch>
+            <a:fillRect/>
+          </a:stretch>
+        </p:blipFill>
+        <p:spPr>
+          <a:xfrm>
+            <a:off x="6876288" y="3456432"/>
+            <a:ext cx="1060704" cy="239573"/>
+          </a:xfrm>
+          <a:prstGeom prst="rect">
+            <a:avLst/>
+          </a:prstGeom>
+        </p:spPr>
+      </p:pic>
+      <p:sp>
+        <p:nvSpPr>
+          <p:cNvPr id="17" name="Text 13"/>
+          <p:cNvSpPr txBox="1"/>
+          <p:nvPr/>
+        </p:nvSpPr>
+        <p:spPr>
+          <a:xfrm>
+            <a:off x="6675120" y="4297680"/>
             <a:ext cx="4946904" cy="822960"/>
           </a:xfrm>
           <a:prstGeom prst="rect">
@@ -14821,7 +14973,7 @@
           <a:ln/>
         </p:spPr>
         <p:txBody>
-          <a:bodyPr wrap="square" lIns="0" tIns="0" rIns="0" bIns="0" rtlCol="0" anchor="ctr"/>
+          <a:bodyPr wrap="square" lIns="0" tIns="0" rIns="0" bIns="0" rtlCol="0" anchor="t"/>
           <a:lstStyle/>
           <a:p>
             <a:pPr indent="0" marL="0">
@@ -14844,7 +14996,7 @@
       </p:sp>
       <p:sp>
         <p:nvSpPr>
-          <p:cNvPr id="17" name="Text 14"/>
+          <p:cNvPr id="18" name="Text 14"/>
           <p:cNvSpPr txBox="1"/>
           <p:nvPr/>
         </p:nvSpPr>
@@ -14883,7 +15035,7 @@
       </p:sp>
       <p:sp>
         <p:nvSpPr>
-          <p:cNvPr id="18" name="Text 15"/>
+          <p:cNvPr id="19" name="Text 15"/>
           <p:cNvSpPr txBox="1"/>
           <p:nvPr/>
         </p:nvSpPr>
@@ -19694,15 +19846,41 @@
                 <a:ea typeface="Calibri" pitchFamily="34" charset="-122"/>
                 <a:cs typeface="Calibri" pitchFamily="34" charset="-120"/>
               </a:rPr>
-              <a:t>Bat calls sit far above the 16 kHz ceiling of a 32 kHz frontend.</a:t>
+              <a:t>Bat calls sit far above 16 kHz.</a:t>
             </a:r>
             <a:endParaRPr lang="en-US" sz="1200" dirty="0"/>
           </a:p>
         </p:txBody>
       </p:sp>
-      <p:sp>
-        <p:nvSpPr>
-          <p:cNvPr id="8" name="Shape 6"/>
+      <p:pic>
+        <p:nvPicPr>
+          <p:cNvPr id="8" name="Image 0" descr="/home/user/valentown/docs/thesis-defence/build/bat_ink_plain.png">    </p:cNvPr>
+          <p:cNvPicPr>
+            <a:picLocks noChangeAspect="1"/>
+          </p:cNvPicPr>
+          <p:nvPr/>
+        </p:nvPicPr>
+        <p:blipFill>
+          <a:blip r:embed="rId1">
+            <a:alphaModFix amt="38000"/>
+          </a:blip>
+          <a:stretch>
+            <a:fillRect/>
+          </a:stretch>
+        </p:blipFill>
+        <p:spPr>
+          <a:xfrm>
+            <a:off x="1225296" y="3255264"/>
+            <a:ext cx="1060704" cy="239573"/>
+          </a:xfrm>
+          <a:prstGeom prst="rect">
+            <a:avLst/>
+          </a:prstGeom>
+        </p:spPr>
+      </p:pic>
+      <p:sp>
+        <p:nvSpPr>
+          <p:cNvPr id="9" name="Shape 6"/>
           <p:cNvSpPr/>
           <p:nvPr/>
         </p:nvSpPr>
@@ -19722,7 +19900,7 @@
       </p:sp>
       <p:sp>
         <p:nvSpPr>
-          <p:cNvPr id="9" name="Shape 7"/>
+          <p:cNvPr id="10" name="Shape 7"/>
           <p:cNvSpPr/>
           <p:nvPr/>
         </p:nvSpPr>
@@ -19756,7 +19934,7 @@
       </p:sp>
       <p:sp>
         <p:nvSpPr>
-          <p:cNvPr id="10" name="Text 8"/>
+          <p:cNvPr id="11" name="Text 8"/>
           <p:cNvSpPr txBox="1"/>
           <p:nvPr/>
         </p:nvSpPr>
@@ -19795,7 +19973,7 @@
       </p:sp>
       <p:sp>
         <p:nvSpPr>
-          <p:cNvPr id="11" name="Text 9"/>
+          <p:cNvPr id="12" name="Text 9"/>
           <p:cNvSpPr txBox="1"/>
           <p:nvPr/>
         </p:nvSpPr>
@@ -19834,7 +20012,7 @@
       </p:sp>
       <p:sp>
         <p:nvSpPr>
-          <p:cNvPr id="12" name="Text 10"/>
+          <p:cNvPr id="13" name="Text 10"/>
           <p:cNvSpPr txBox="1"/>
           <p:nvPr/>
         </p:nvSpPr>
@@ -19876,7 +20054,7 @@
       </p:sp>
       <p:sp>
         <p:nvSpPr>
-          <p:cNvPr id="13" name="Shape 11"/>
+          <p:cNvPr id="14" name="Shape 11"/>
           <p:cNvSpPr/>
           <p:nvPr/>
         </p:nvSpPr>
@@ -19896,7 +20074,7 @@
       </p:sp>
       <p:sp>
         <p:nvSpPr>
-          <p:cNvPr id="14" name="Shape 12"/>
+          <p:cNvPr id="15" name="Shape 12"/>
           <p:cNvSpPr/>
           <p:nvPr/>
         </p:nvSpPr>
@@ -19930,7 +20108,7 @@
       </p:sp>
       <p:sp>
         <p:nvSpPr>
-          <p:cNvPr id="15" name="Text 13"/>
+          <p:cNvPr id="16" name="Text 13"/>
           <p:cNvSpPr txBox="1"/>
           <p:nvPr/>
         </p:nvSpPr>
@@ -19969,7 +20147,7 @@
       </p:sp>
       <p:sp>
         <p:nvSpPr>
-          <p:cNvPr id="16" name="Text 14"/>
+          <p:cNvPr id="17" name="Text 14"/>
           <p:cNvSpPr txBox="1"/>
           <p:nvPr/>
         </p:nvSpPr>
@@ -20008,7 +20186,7 @@
       </p:sp>
       <p:sp>
         <p:nvSpPr>
-          <p:cNvPr id="17" name="Text 15"/>
+          <p:cNvPr id="18" name="Text 15"/>
           <p:cNvSpPr txBox="1"/>
           <p:nvPr/>
         </p:nvSpPr>
@@ -20050,7 +20228,7 @@
       </p:sp>
       <p:sp>
         <p:nvSpPr>
-          <p:cNvPr id="18" name="Shape 16"/>
+          <p:cNvPr id="19" name="Shape 16"/>
           <p:cNvSpPr/>
           <p:nvPr/>
         </p:nvSpPr>
@@ -20070,7 +20248,7 @@
       </p:sp>
       <p:sp>
         <p:nvSpPr>
-          <p:cNvPr id="19" name="Shape 17"/>
+          <p:cNvPr id="20" name="Shape 17"/>
           <p:cNvSpPr/>
           <p:nvPr/>
         </p:nvSpPr>
@@ -20097,7 +20275,7 @@
       </p:sp>
       <p:sp>
         <p:nvSpPr>
-          <p:cNvPr id="20" name="Text 18"/>
+          <p:cNvPr id="21" name="Text 18"/>
           <p:cNvSpPr txBox="1"/>
           <p:nvPr/>
         </p:nvSpPr>
@@ -20136,7 +20314,7 @@
       </p:sp>
       <p:sp>
         <p:nvSpPr>
-          <p:cNvPr id="21" name="Text 19"/>
+          <p:cNvPr id="22" name="Text 19"/>
           <p:cNvSpPr txBox="1"/>
           <p:nvPr/>
         </p:nvSpPr>
@@ -20175,7 +20353,7 @@
       </p:sp>
       <p:sp>
         <p:nvSpPr>
-          <p:cNvPr id="22" name="Text 20"/>
+          <p:cNvPr id="23" name="Text 20"/>
           <p:cNvSpPr txBox="1"/>
           <p:nvPr/>
         </p:nvSpPr>
@@ -20217,7 +20395,7 @@
       </p:sp>
       <p:sp>
         <p:nvSpPr>
-          <p:cNvPr id="23" name="Shape 21"/>
+          <p:cNvPr id="24" name="Shape 21"/>
           <p:cNvSpPr/>
           <p:nvPr/>
         </p:nvSpPr>
@@ -20244,7 +20422,7 @@
       </p:sp>
       <p:sp>
         <p:nvSpPr>
-          <p:cNvPr id="24" name="Text 22"/>
+          <p:cNvPr id="25" name="Text 22"/>
           <p:cNvSpPr txBox="1"/>
           <p:nvPr/>
         </p:nvSpPr>
@@ -20283,7 +20461,7 @@
       </p:sp>
       <p:sp>
         <p:nvSpPr>
-          <p:cNvPr id="25" name="Text 23"/>
+          <p:cNvPr id="26" name="Text 23"/>
           <p:cNvSpPr txBox="1"/>
           <p:nvPr/>
         </p:nvSpPr>
@@ -20325,7 +20503,7 @@
       </p:sp>
       <p:sp>
         <p:nvSpPr>
-          <p:cNvPr id="26" name="Shape 24"/>
+          <p:cNvPr id="27" name="Shape 24"/>
           <p:cNvSpPr/>
           <p:nvPr/>
         </p:nvSpPr>
@@ -20352,7 +20530,7 @@
       </p:sp>
       <p:sp>
         <p:nvSpPr>
-          <p:cNvPr id="27" name="Text 25"/>
+          <p:cNvPr id="28" name="Text 25"/>
           <p:cNvSpPr txBox="1"/>
           <p:nvPr/>
         </p:nvSpPr>
@@ -20391,7 +20569,7 @@
       </p:sp>
       <p:sp>
         <p:nvSpPr>
-          <p:cNvPr id="28" name="Text 26"/>
+          <p:cNvPr id="29" name="Text 26"/>
           <p:cNvSpPr txBox="1"/>
           <p:nvPr/>
         </p:nvSpPr>
@@ -20433,7 +20611,7 @@
       </p:sp>
       <p:sp>
         <p:nvSpPr>
-          <p:cNvPr id="29" name="Text 27"/>
+          <p:cNvPr id="30" name="Text 27"/>
           <p:cNvSpPr txBox="1"/>
           <p:nvPr/>
         </p:nvSpPr>
@@ -20472,7 +20650,7 @@
       </p:sp>
       <p:sp>
         <p:nvSpPr>
-          <p:cNvPr id="30" name="Text 28"/>
+          <p:cNvPr id="31" name="Text 28"/>
           <p:cNvSpPr txBox="1"/>
           <p:nvPr/>
         </p:nvSpPr>
